--- a/marketing/Vriddhi_Investor_Deck.pptx
+++ b/marketing/Vriddhi_Investor_Deck.pptx
@@ -8708,6 +8708,34 @@
               <a:t>&lt;colleges in pilot conversation&gt; colleges in active conversation; &lt;n&gt; letters of intent signed.</a:t>
             </a:r>
           </a:p>
+          <a:p>
+            <a:pPr algn="l">
+              <a:lnSpc>
+                <a:spcPct val="114000"/>
+              </a:lnSpc>
+              <a:spcAft>
+                <a:spcPts val="900"/>
+              </a:spcAft>
+            </a:pPr>
+            <a:r>
+              <a:rPr sz="900" b="0" i="0">
+                <a:solidFill>
+                  <a:srgbClr val="14B8A6"/>
+                </a:solidFill>
+                <a:latin typeface="Inter"/>
+              </a:rPr>
+              <a:t>●  </a:t>
+            </a:r>
+            <a:r>
+              <a:rPr sz="1100" b="0" i="0">
+                <a:solidFill>
+                  <a:srgbClr val="475569"/>
+                </a:solidFill>
+                <a:latin typeface="Inter"/>
+              </a:rPr>
+              <a:t>Raising ₹50 L to convert that interest into 5 paid pilots within 90 days.</a:t>
+            </a:r>
+          </a:p>
         </p:txBody>
       </p:sp>
       <p:sp>
@@ -9244,7 +9272,7 @@
                 </a:solidFill>
                 <a:latin typeface="Inter"/>
               </a:rPr>
-              <a:t>Horizon 1 · 0–6 months · ₹35–45 L</a:t>
+              <a:t>Horizon 1 · months 0–6 · funded by this round</a:t>
             </a:r>
           </a:p>
         </p:txBody>
@@ -9414,7 +9442,7 @@
                 </a:solidFill>
                 <a:latin typeface="Inter"/>
               </a:rPr>
-              <a:t>Horizon 2 · 6–18 months · ₹50–70 L</a:t>
+              <a:t>Horizon 2 · months 6–12 · started on this bridge</a:t>
             </a:r>
           </a:p>
         </p:txBody>
@@ -9453,7 +9481,7 @@
                 </a:solidFill>
                 <a:latin typeface="Inter"/>
               </a:rPr>
-              <a:t>Course marketplace · 10–14 certificate programmes · corporate L&amp;D · proctored assessment · placement pack v2. Unlocks: non-licence revenue at 85 %+ margin.</a:t>
+              <a:t>Course marketplace · first Kannada programmes · corporate L&amp;D · proctored assessment · placement pack v2. Unlocks: non-licence revenue at 85 %+ margin.</a:t>
             </a:r>
           </a:p>
         </p:txBody>
@@ -9584,7 +9612,7 @@
                 </a:solidFill>
                 <a:latin typeface="Inter"/>
               </a:rPr>
-              <a:t>Horizon 3 · 18–36 months · ₹1–2 Cr</a:t>
+              <a:t>Horizon 3 · year 2–3 · seed round</a:t>
             </a:r>
           </a:p>
         </p:txBody>
@@ -12159,7 +12187,7 @@
                 </a:solidFill>
                 <a:latin typeface="Inter"/>
               </a:rPr>
-              <a:t>&lt;₹1.5 Cr&gt; for &lt;15 %&gt; — and three specific introductions</a:t>
+              <a:t>₹50 L for 8–10 % — and three specific introductions</a:t>
             </a:r>
           </a:p>
         </p:txBody>
@@ -12720,7 +12748,7 @@
                 </a:solidFill>
                 <a:latin typeface="Inter"/>
               </a:rPr>
-              <a:t>Use of funds: 40 % engineering · 18 % content · 25 % sales &amp; implementation · 6 % cloud/AI · 5 % legal &amp; compliance · 6 % contingency.</a:t>
+              <a:t>Use of funds: 36 % engineering · 18 % implementation &amp; pilots · 16 % content · 10 % sales · 8 % contingency · 6 % cloud/AI · 6 % legal.</a:t>
             </a:r>
           </a:p>
           <a:p>
@@ -12748,7 +12776,7 @@
                 </a:solidFill>
                 <a:latin typeface="Inter"/>
               </a:rPr>
-              <a:t>18-month milestones: 25 paying colleges, ₹1–1.5 Cr ARR, 10 certificate programmes, 1,000+ paid learners, 1 university agreement.</a:t>
+              <a:t>9-month milestones: 5 paid pilots by month 3 · 10 colleges live and ₹25–35 L ARR by month 9 · 8 certificate programmes · then the seed round.</a:t>
             </a:r>
           </a:p>
           <a:p>
@@ -12776,7 +12804,7 @@
                 </a:solidFill>
                 <a:latin typeface="Inter"/>
               </a:rPr>
-              <a:t>Governance we welcome: monthly metrics, quarterly board review, and a named risk register reviewed every quarter.</a:t>
+              <a:t>Governance we welcome: monthly metrics, a quarterly board review, and a named risk register reviewed every quarter.</a:t>
             </a:r>
           </a:p>
         </p:txBody>
